--- a/tests/fixtures/safe/fixture.pptx
+++ b/tests/fixtures/safe/fixture.pptx
@@ -143,7 +143,7 @@
         <p:txBody>
           <a:bodyPr/>
           <a:p>
-            <a:fld id="{0FC39310-B0C7-4F08-BFD2-E9DB0BDABAD1}" type="slidenum">
+            <a:fld id="{8E769E3E-3F68-4D8E-AB34-63DC6F067269}" type="slidenum">
               <a:t>&lt;#&gt;</a:t>
             </a:fld>
           </a:p>
@@ -628,7 +628,7 @@
             <a:pPr indent="0" algn="r">
               <a:buNone/>
             </a:pPr>
-            <a:fld id="{E6952C68-1EE1-42C8-B291-A7ED6B40DE25}" type="slidenum">
+            <a:fld id="{4216AB6D-35B0-42D8-8DD1-06ECA54312BE}" type="slidenum">
               <a:rPr b="0" lang="en-US" sz="1400" spc="-1" strike="noStrike">
                 <a:solidFill>
                   <a:srgbClr val="000000"/>
@@ -672,6 +672,69 @@
           <a:chExt cx="0" cy="0"/>
         </a:xfrm>
       </p:grpSpPr>
+      <p:sp>
+        <p:nvSpPr>
+          <p:cNvPr id="7" name=""/>
+          <p:cNvSpPr txBox="1"/>
+          <p:nvPr/>
+        </p:nvSpPr>
+        <p:spPr>
+          <a:xfrm>
+            <a:off x="720000" y="2160000"/>
+            <a:ext cx="7200000" cy="1440000"/>
+          </a:xfrm>
+          <a:prstGeom prst="rect">
+            <a:avLst/>
+          </a:prstGeom>
+          <a:solidFill>
+            <a:srgbClr val="729fcf"/>
+          </a:solidFill>
+          <a:ln w="0">
+            <a:solidFill>
+              <a:srgbClr val="3465a4"/>
+            </a:solidFill>
+          </a:ln>
+        </p:spPr>
+        <p:txBody>
+          <a:bodyPr lIns="90000" rIns="90000" tIns="45000" bIns="45000" anchor="t">
+            <a:noAutofit/>
+          </a:bodyPr>
+          <a:p>
+            <a:r>
+              <a:rPr b="0" lang="en-US" sz="1800" spc="-1" strike="noStrike">
+                <a:solidFill>
+                  <a:srgbClr val="000000"/>
+                </a:solidFill>
+                <a:latin typeface="Arial"/>
+              </a:rPr>
+              <a:t>Hello ClippyShot.</a:t>
+            </a:r>
+            <a:endParaRPr b="0" lang="en-US" sz="1800" spc="-1" strike="noStrike">
+              <a:solidFill>
+                <a:srgbClr val="000000"/>
+              </a:solidFill>
+              <a:latin typeface="Arial"/>
+            </a:endParaRPr>
+          </a:p>
+          <a:p>
+            <a:r>
+              <a:rPr b="0" lang="en-US" sz="1800" spc="-1" strike="noStrike">
+                <a:solidFill>
+                  <a:srgbClr val="000000"/>
+                </a:solidFill>
+                <a:latin typeface="Arial"/>
+              </a:rPr>
+              <a:t>Line two.</a:t>
+            </a:r>
+            <a:endParaRPr b="0" lang="en-US" sz="1800" spc="-1" strike="noStrike">
+              <a:solidFill>
+                <a:srgbClr val="000000"/>
+              </a:solidFill>
+              <a:latin typeface="Arial"/>
+            </a:endParaRPr>
+          </a:p>
+        </p:txBody>
+      </p:sp>
     </p:spTree>
   </p:cSld>
   <mc:AlternateContent>
